--- a/SQL활용 평가/SQL활용(개인파트).pptx
+++ b/SQL활용 평가/SQL활용(개인파트).pptx
@@ -104,6 +104,11 @@
       </a:defRPr>
     </a:lvl9pPr>
   </p:defaultTextStyle>
+  <p:extLst>
+    <p:ext uri="{EFAFB233-063F-42B5-8137-9DF3F51BA10A}">
+      <p15:sldGuideLst xmlns:p15="http://schemas.microsoft.com/office/powerpoint/2012/main"/>
+    </p:ext>
+  </p:extLst>
 </p:presentation>
 </file>
 
@@ -254,7 +259,7 @@
           <a:p>
             <a:fld id="{7E1CB9B0-D38A-4B44-9296-D915A20C935D}" type="datetimeFigureOut">
               <a:rPr lang="ko-KR" altLang="en-US" smtClean="0"/>
-              <a:t>2026-04-16</a:t>
+              <a:t>2026-04-17</a:t>
             </a:fld>
             <a:endParaRPr lang="ko-KR" altLang="en-US"/>
           </a:p>
@@ -452,7 +457,7 @@
           <a:p>
             <a:fld id="{7E1CB9B0-D38A-4B44-9296-D915A20C935D}" type="datetimeFigureOut">
               <a:rPr lang="ko-KR" altLang="en-US" smtClean="0"/>
-              <a:t>2026-04-16</a:t>
+              <a:t>2026-04-17</a:t>
             </a:fld>
             <a:endParaRPr lang="ko-KR" altLang="en-US"/>
           </a:p>
@@ -660,7 +665,7 @@
           <a:p>
             <a:fld id="{7E1CB9B0-D38A-4B44-9296-D915A20C935D}" type="datetimeFigureOut">
               <a:rPr lang="ko-KR" altLang="en-US" smtClean="0"/>
-              <a:t>2026-04-16</a:t>
+              <a:t>2026-04-17</a:t>
             </a:fld>
             <a:endParaRPr lang="ko-KR" altLang="en-US"/>
           </a:p>
@@ -858,7 +863,7 @@
           <a:p>
             <a:fld id="{7E1CB9B0-D38A-4B44-9296-D915A20C935D}" type="datetimeFigureOut">
               <a:rPr lang="ko-KR" altLang="en-US" smtClean="0"/>
-              <a:t>2026-04-16</a:t>
+              <a:t>2026-04-17</a:t>
             </a:fld>
             <a:endParaRPr lang="ko-KR" altLang="en-US"/>
           </a:p>
@@ -1133,7 +1138,7 @@
           <a:p>
             <a:fld id="{7E1CB9B0-D38A-4B44-9296-D915A20C935D}" type="datetimeFigureOut">
               <a:rPr lang="ko-KR" altLang="en-US" smtClean="0"/>
-              <a:t>2026-04-16</a:t>
+              <a:t>2026-04-17</a:t>
             </a:fld>
             <a:endParaRPr lang="ko-KR" altLang="en-US"/>
           </a:p>
@@ -1398,7 +1403,7 @@
           <a:p>
             <a:fld id="{7E1CB9B0-D38A-4B44-9296-D915A20C935D}" type="datetimeFigureOut">
               <a:rPr lang="ko-KR" altLang="en-US" smtClean="0"/>
-              <a:t>2026-04-16</a:t>
+              <a:t>2026-04-17</a:t>
             </a:fld>
             <a:endParaRPr lang="ko-KR" altLang="en-US"/>
           </a:p>
@@ -1810,7 +1815,7 @@
           <a:p>
             <a:fld id="{7E1CB9B0-D38A-4B44-9296-D915A20C935D}" type="datetimeFigureOut">
               <a:rPr lang="ko-KR" altLang="en-US" smtClean="0"/>
-              <a:t>2026-04-16</a:t>
+              <a:t>2026-04-17</a:t>
             </a:fld>
             <a:endParaRPr lang="ko-KR" altLang="en-US"/>
           </a:p>
@@ -1951,7 +1956,7 @@
           <a:p>
             <a:fld id="{7E1CB9B0-D38A-4B44-9296-D915A20C935D}" type="datetimeFigureOut">
               <a:rPr lang="ko-KR" altLang="en-US" smtClean="0"/>
-              <a:t>2026-04-16</a:t>
+              <a:t>2026-04-17</a:t>
             </a:fld>
             <a:endParaRPr lang="ko-KR" altLang="en-US"/>
           </a:p>
@@ -2064,7 +2069,7 @@
           <a:p>
             <a:fld id="{7E1CB9B0-D38A-4B44-9296-D915A20C935D}" type="datetimeFigureOut">
               <a:rPr lang="ko-KR" altLang="en-US" smtClean="0"/>
-              <a:t>2026-04-16</a:t>
+              <a:t>2026-04-17</a:t>
             </a:fld>
             <a:endParaRPr lang="ko-KR" altLang="en-US"/>
           </a:p>
@@ -2375,7 +2380,7 @@
           <a:p>
             <a:fld id="{7E1CB9B0-D38A-4B44-9296-D915A20C935D}" type="datetimeFigureOut">
               <a:rPr lang="ko-KR" altLang="en-US" smtClean="0"/>
-              <a:t>2026-04-16</a:t>
+              <a:t>2026-04-17</a:t>
             </a:fld>
             <a:endParaRPr lang="ko-KR" altLang="en-US"/>
           </a:p>
@@ -2663,7 +2668,7 @@
           <a:p>
             <a:fld id="{7E1CB9B0-D38A-4B44-9296-D915A20C935D}" type="datetimeFigureOut">
               <a:rPr lang="ko-KR" altLang="en-US" smtClean="0"/>
-              <a:t>2026-04-16</a:t>
+              <a:t>2026-04-17</a:t>
             </a:fld>
             <a:endParaRPr lang="ko-KR" altLang="en-US"/>
           </a:p>
@@ -2904,7 +2909,7 @@
           <a:p>
             <a:fld id="{7E1CB9B0-D38A-4B44-9296-D915A20C935D}" type="datetimeFigureOut">
               <a:rPr lang="ko-KR" altLang="en-US" smtClean="0"/>
-              <a:t>2026-04-16</a:t>
+              <a:t>2026-04-17</a:t>
             </a:fld>
             <a:endParaRPr lang="ko-KR" altLang="en-US"/>
           </a:p>
@@ -3373,15 +3378,23 @@
             </a:pPr>
             <a:r>
               <a:rPr lang="ko-KR" altLang="en-US" dirty="0"/>
-              <a:t>농산물 거래 시스템에서 회원은 제품을 보고 구매하는 과정이 담겨야 하므로 제품과 구매한 회원 정보</a:t>
+              <a:t>농수산물 거래 시스템에서 회원은 제품을 구매 </a:t>
+            </a:r>
+            <a:r>
+              <a:rPr lang="ko-KR" altLang="en-US" dirty="0" err="1"/>
+              <a:t>했을때</a:t>
+            </a:r>
+            <a:r>
+              <a:rPr lang="ko-KR" altLang="en-US" dirty="0"/>
+              <a:t> 주문에 관한 정보가 담겨야 하므로 주문정보에 대한 데이터를 </a:t>
             </a:r>
             <a:r>
               <a:rPr lang="en-US" altLang="ko-KR" dirty="0"/>
-              <a:t>, </a:t>
+              <a:t>order</a:t>
             </a:r>
             <a:r>
               <a:rPr lang="ko-KR" altLang="en-US" dirty="0"/>
-              <a:t>구매에 관한 정보를 가진 데이터를 저장한다</a:t>
+              <a:t>테이블에 저장한다</a:t>
             </a:r>
             <a:r>
               <a:rPr lang="en-US" altLang="ko-KR" dirty="0"/>

--- a/SQL활용 평가/SQL활용(개인파트).pptx
+++ b/SQL활용 평가/SQL활용(개인파트).pptx
@@ -3418,7 +3418,7 @@
           <p:nvPr>
             <p:extLst>
               <p:ext uri="{D42A27DB-BD31-4B8C-83A1-F6EECF244321}">
-                <p14:modId xmlns:p14="http://schemas.microsoft.com/office/powerpoint/2010/main" val="64246008"/>
+                <p14:modId xmlns:p14="http://schemas.microsoft.com/office/powerpoint/2010/main" val="3023727306"/>
               </p:ext>
             </p:extLst>
           </p:nvPr>
@@ -3567,7 +3567,7 @@
                       <a:pPr algn="l" latinLnBrk="1"/>
                       <a:r>
                         <a:rPr lang="en-US" altLang="ko-KR" sz="1200" dirty="0"/>
-                        <a:t>Name</a:t>
+                        <a:t>name</a:t>
                       </a:r>
                       <a:endParaRPr lang="ko-KR" altLang="en-US" sz="1200" dirty="0"/>
                     </a:p>
@@ -3687,7 +3687,7 @@
                       <a:pPr algn="l" latinLnBrk="1"/>
                       <a:r>
                         <a:rPr lang="en-US" altLang="ko-KR" sz="1200" dirty="0"/>
-                        <a:t>Phone</a:t>
+                        <a:t>phone</a:t>
                       </a:r>
                       <a:endParaRPr lang="ko-KR" altLang="en-US" sz="1200" dirty="0"/>
                     </a:p>
@@ -3785,14 +3785,14 @@
           <p:nvPr>
             <p:extLst>
               <p:ext uri="{D42A27DB-BD31-4B8C-83A1-F6EECF244321}">
-                <p14:modId xmlns:p14="http://schemas.microsoft.com/office/powerpoint/2010/main" val="4013425419"/>
+                <p14:modId xmlns:p14="http://schemas.microsoft.com/office/powerpoint/2010/main" val="1785900018"/>
               </p:ext>
             </p:extLst>
           </p:nvPr>
         </p:nvGraphicFramePr>
         <p:xfrm>
-          <a:off x="8108012" y="3429000"/>
-          <a:ext cx="4022469" cy="2870200"/>
+          <a:off x="8112154" y="3429000"/>
+          <a:ext cx="4018327" cy="3241040"/>
         </p:xfrm>
         <a:graphic>
           <a:graphicData uri="http://schemas.openxmlformats.org/drawingml/2006/table">
@@ -3801,21 +3801,21 @@
                 <a:tableStyleId>{5C22544A-7EE6-4342-B048-85BDC9FD1C3A}</a:tableStyleId>
               </a:tblPr>
               <a:tblGrid>
-                <a:gridCol w="1340823">
+                <a:gridCol w="1686187">
                   <a:extLst>
                     <a:ext uri="{9D8B030D-6E8A-4147-A177-3AD203B41FA5}">
                       <a16:colId xmlns:a16="http://schemas.microsoft.com/office/drawing/2014/main" val="3991458496"/>
                     </a:ext>
                   </a:extLst>
                 </a:gridCol>
-                <a:gridCol w="1340823">
+                <a:gridCol w="1493241">
                   <a:extLst>
                     <a:ext uri="{9D8B030D-6E8A-4147-A177-3AD203B41FA5}">
                       <a16:colId xmlns:a16="http://schemas.microsoft.com/office/drawing/2014/main" val="1918976038"/>
                     </a:ext>
                   </a:extLst>
                 </a:gridCol>
-                <a:gridCol w="1340823">
+                <a:gridCol w="838899">
                   <a:extLst>
                     <a:ext uri="{9D8B030D-6E8A-4147-A177-3AD203B41FA5}">
                       <a16:colId xmlns:a16="http://schemas.microsoft.com/office/drawing/2014/main" val="307046011"/>
@@ -3882,7 +3882,7 @@
                       <a:pPr algn="l" latinLnBrk="1"/>
                       <a:r>
                         <a:rPr lang="en-US" altLang="ko-KR" sz="1200" dirty="0" err="1"/>
-                        <a:t>Product_id</a:t>
+                        <a:t>product_id</a:t>
                       </a:r>
                       <a:endParaRPr lang="ko-KR" altLang="en-US" sz="1200" dirty="0"/>
                     </a:p>
@@ -3934,7 +3934,7 @@
                       <a:pPr algn="l" latinLnBrk="1"/>
                       <a:r>
                         <a:rPr lang="en-US" altLang="ko-KR" sz="1200" dirty="0" err="1"/>
-                        <a:t>Seller_id</a:t>
+                        <a:t>seller_id</a:t>
                       </a:r>
                       <a:endParaRPr lang="ko-KR" altLang="en-US" sz="1200" dirty="0"/>
                     </a:p>
@@ -3986,7 +3986,7 @@
                       <a:pPr algn="l" latinLnBrk="1"/>
                       <a:r>
                         <a:rPr lang="en-US" altLang="ko-KR" sz="1200" dirty="0" err="1"/>
-                        <a:t>product_img</a:t>
+                        <a:t>category_category_id</a:t>
                       </a:r>
                       <a:endParaRPr lang="ko-KR" altLang="en-US" sz="1200" dirty="0"/>
                     </a:p>
@@ -4001,7 +4001,7 @@
                       <a:pPr algn="l" latinLnBrk="1"/>
                       <a:r>
                         <a:rPr lang="en-US" altLang="ko-KR" sz="1200" dirty="0"/>
-                        <a:t>BLOB</a:t>
+                        <a:t>INT</a:t>
                       </a:r>
                       <a:endParaRPr lang="ko-KR" altLang="en-US" sz="1200" dirty="0"/>
                     </a:p>
@@ -4032,7 +4032,7 @@
                       </a:pPr>
                       <a:r>
                         <a:rPr lang="en-US" altLang="ko-KR" sz="1200" dirty="0"/>
-                        <a:t>Not null</a:t>
+                        <a:t>FK</a:t>
                       </a:r>
                       <a:endParaRPr lang="ko-KR" altLang="en-US" sz="1200" dirty="0"/>
                     </a:p>
@@ -4046,21 +4046,6 @@
                 </a:extLst>
               </a:tr>
               <a:tr h="370840">
-                <a:tc>
-                  <a:txBody>
-                    <a:bodyPr/>
-                    <a:lstStyle/>
-                    <a:p>
-                      <a:pPr algn="l" latinLnBrk="1"/>
-                      <a:r>
-                        <a:rPr lang="en-US" altLang="ko-KR" sz="1200" dirty="0" err="1"/>
-                        <a:t>product_info</a:t>
-                      </a:r>
-                      <a:endParaRPr lang="ko-KR" altLang="en-US" sz="1200" dirty="0"/>
-                    </a:p>
-                  </a:txBody>
-                  <a:tcPr/>
-                </a:tc>
                 <a:tc>
                   <a:txBody>
                     <a:bodyPr/>
@@ -4084,8 +4069,8 @@
                         <a:defRPr/>
                       </a:pPr>
                       <a:r>
-                        <a:rPr lang="en-US" altLang="ko-KR" sz="1200" dirty="0"/>
-                        <a:t>VARCHAR(200)</a:t>
+                        <a:rPr lang="en-US" altLang="ko-KR" sz="1200" dirty="0" err="1"/>
+                        <a:t>product_img</a:t>
                       </a:r>
                       <a:endParaRPr lang="ko-KR" altLang="en-US" sz="1200" dirty="0"/>
                     </a:p>
@@ -4116,29 +4101,7 @@
                       </a:pPr>
                       <a:r>
                         <a:rPr lang="en-US" altLang="ko-KR" sz="1200" dirty="0"/>
-                        <a:t>Not null</a:t>
-                      </a:r>
-                      <a:endParaRPr lang="ko-KR" altLang="en-US" sz="1200" dirty="0"/>
-                    </a:p>
-                  </a:txBody>
-                  <a:tcPr/>
-                </a:tc>
-                <a:extLst>
-                  <a:ext uri="{0D108BD9-81ED-4DB2-BD59-A6C34878D82A}">
-                    <a16:rowId xmlns:a16="http://schemas.microsoft.com/office/drawing/2014/main" val="832774162"/>
-                  </a:ext>
-                </a:extLst>
-              </a:tr>
-              <a:tr h="370840">
-                <a:tc>
-                  <a:txBody>
-                    <a:bodyPr/>
-                    <a:lstStyle/>
-                    <a:p>
-                      <a:pPr algn="l" latinLnBrk="1"/>
-                      <a:r>
-                        <a:rPr lang="en-US" altLang="ko-KR" sz="1200" dirty="0"/>
-                        <a:t>address</a:t>
+                        <a:t>BLOB</a:t>
                       </a:r>
                       <a:endParaRPr lang="ko-KR" altLang="en-US" sz="1200" dirty="0"/>
                     </a:p>
@@ -4169,7 +4132,29 @@
                       </a:pPr>
                       <a:r>
                         <a:rPr lang="en-US" altLang="ko-KR" sz="1200" dirty="0"/>
-                        <a:t>VARCHAR(200)</a:t>
+                        <a:t>Not null</a:t>
+                      </a:r>
+                      <a:endParaRPr lang="ko-KR" altLang="en-US" sz="1200" dirty="0"/>
+                    </a:p>
+                  </a:txBody>
+                  <a:tcPr/>
+                </a:tc>
+                <a:extLst>
+                  <a:ext uri="{0D108BD9-81ED-4DB2-BD59-A6C34878D82A}">
+                    <a16:rowId xmlns:a16="http://schemas.microsoft.com/office/drawing/2014/main" val="832774162"/>
+                  </a:ext>
+                </a:extLst>
+              </a:tr>
+              <a:tr h="370840">
+                <a:tc>
+                  <a:txBody>
+                    <a:bodyPr/>
+                    <a:lstStyle/>
+                    <a:p>
+                      <a:pPr algn="l" latinLnBrk="1"/>
+                      <a:r>
+                        <a:rPr lang="en-US" altLang="ko-KR" sz="1200" dirty="0" err="1"/>
+                        <a:t>product_info</a:t>
                       </a:r>
                       <a:endParaRPr lang="ko-KR" altLang="en-US" sz="1200" dirty="0"/>
                     </a:p>
@@ -4200,28 +4185,7 @@
                       </a:pPr>
                       <a:r>
                         <a:rPr lang="en-US" altLang="ko-KR" sz="1200" dirty="0"/>
-                        <a:t>Not null</a:t>
-                      </a:r>
-                    </a:p>
-                  </a:txBody>
-                  <a:tcPr/>
-                </a:tc>
-                <a:extLst>
-                  <a:ext uri="{0D108BD9-81ED-4DB2-BD59-A6C34878D82A}">
-                    <a16:rowId xmlns:a16="http://schemas.microsoft.com/office/drawing/2014/main" val="4284433116"/>
-                  </a:ext>
-                </a:extLst>
-              </a:tr>
-              <a:tr h="370840">
-                <a:tc>
-                  <a:txBody>
-                    <a:bodyPr/>
-                    <a:lstStyle/>
-                    <a:p>
-                      <a:pPr algn="l" latinLnBrk="1"/>
-                      <a:r>
-                        <a:rPr lang="en-US" altLang="ko-KR" sz="1200" dirty="0"/>
-                        <a:t>price</a:t>
+                        <a:t>VARCHAR(200)</a:t>
                       </a:r>
                       <a:endParaRPr lang="ko-KR" altLang="en-US" sz="1200" dirty="0"/>
                     </a:p>
@@ -4252,7 +4216,29 @@
                       </a:pPr>
                       <a:r>
                         <a:rPr lang="en-US" altLang="ko-KR" sz="1200" dirty="0"/>
-                        <a:t>VARCHAR(45)</a:t>
+                        <a:t>Not null</a:t>
+                      </a:r>
+                      <a:endParaRPr lang="ko-KR" altLang="en-US" sz="1200" dirty="0"/>
+                    </a:p>
+                  </a:txBody>
+                  <a:tcPr/>
+                </a:tc>
+                <a:extLst>
+                  <a:ext uri="{0D108BD9-81ED-4DB2-BD59-A6C34878D82A}">
+                    <a16:rowId xmlns:a16="http://schemas.microsoft.com/office/drawing/2014/main" val="4284433116"/>
+                  </a:ext>
+                </a:extLst>
+              </a:tr>
+              <a:tr h="370840">
+                <a:tc>
+                  <a:txBody>
+                    <a:bodyPr/>
+                    <a:lstStyle/>
+                    <a:p>
+                      <a:pPr algn="l" latinLnBrk="1"/>
+                      <a:r>
+                        <a:rPr lang="en-US" altLang="ko-KR" sz="1200" dirty="0"/>
+                        <a:t>address</a:t>
                       </a:r>
                       <a:endParaRPr lang="ko-KR" altLang="en-US" sz="1200" dirty="0"/>
                     </a:p>
@@ -4283,6 +4269,37 @@
                       </a:pPr>
                       <a:r>
                         <a:rPr lang="en-US" altLang="ko-KR" sz="1200" dirty="0"/>
+                        <a:t>VARCHAR(200)</a:t>
+                      </a:r>
+                      <a:endParaRPr lang="ko-KR" altLang="en-US" sz="1200" dirty="0"/>
+                    </a:p>
+                  </a:txBody>
+                  <a:tcPr/>
+                </a:tc>
+                <a:tc>
+                  <a:txBody>
+                    <a:bodyPr/>
+                    <a:lstStyle/>
+                    <a:p>
+                      <a:pPr marL="0" marR="0" lvl="0" indent="0" algn="l" defTabSz="914400" rtl="0" eaLnBrk="1" fontAlgn="auto" latinLnBrk="1" hangingPunct="1">
+                        <a:lnSpc>
+                          <a:spcPct val="100000"/>
+                        </a:lnSpc>
+                        <a:spcBef>
+                          <a:spcPts val="0"/>
+                        </a:spcBef>
+                        <a:spcAft>
+                          <a:spcPts val="0"/>
+                        </a:spcAft>
+                        <a:buClrTx/>
+                        <a:buSzTx/>
+                        <a:buFontTx/>
+                        <a:buNone/>
+                        <a:tabLst/>
+                        <a:defRPr/>
+                      </a:pPr>
+                      <a:r>
+                        <a:rPr lang="en-US" altLang="ko-KR" sz="1200" dirty="0"/>
                         <a:t>Not null</a:t>
                       </a:r>
                     </a:p>
@@ -4292,6 +4309,89 @@
                 <a:extLst>
                   <a:ext uri="{0D108BD9-81ED-4DB2-BD59-A6C34878D82A}">
                     <a16:rowId xmlns:a16="http://schemas.microsoft.com/office/drawing/2014/main" val="2366268718"/>
+                  </a:ext>
+                </a:extLst>
+              </a:tr>
+              <a:tr h="370840">
+                <a:tc>
+                  <a:txBody>
+                    <a:bodyPr/>
+                    <a:lstStyle/>
+                    <a:p>
+                      <a:pPr algn="l" latinLnBrk="1"/>
+                      <a:r>
+                        <a:rPr lang="en-US" altLang="ko-KR" sz="1200" dirty="0"/>
+                        <a:t>price</a:t>
+                      </a:r>
+                      <a:endParaRPr lang="ko-KR" altLang="en-US" sz="1200" dirty="0"/>
+                    </a:p>
+                  </a:txBody>
+                  <a:tcPr/>
+                </a:tc>
+                <a:tc>
+                  <a:txBody>
+                    <a:bodyPr/>
+                    <a:lstStyle/>
+                    <a:p>
+                      <a:pPr marL="0" marR="0" lvl="0" indent="0" algn="l" defTabSz="914400" rtl="0" eaLnBrk="1" fontAlgn="auto" latinLnBrk="1" hangingPunct="1">
+                        <a:lnSpc>
+                          <a:spcPct val="100000"/>
+                        </a:lnSpc>
+                        <a:spcBef>
+                          <a:spcPts val="0"/>
+                        </a:spcBef>
+                        <a:spcAft>
+                          <a:spcPts val="0"/>
+                        </a:spcAft>
+                        <a:buClrTx/>
+                        <a:buSzTx/>
+                        <a:buFontTx/>
+                        <a:buNone/>
+                        <a:tabLst/>
+                        <a:defRPr/>
+                      </a:pPr>
+                      <a:r>
+                        <a:rPr lang="en-US" altLang="ko-KR" sz="1200" dirty="0"/>
+                        <a:t>VARCHAR(45)</a:t>
+                      </a:r>
+                      <a:endParaRPr lang="ko-KR" altLang="en-US" sz="1200" dirty="0"/>
+                    </a:p>
+                  </a:txBody>
+                  <a:tcPr/>
+                </a:tc>
+                <a:tc>
+                  <a:txBody>
+                    <a:bodyPr/>
+                    <a:lstStyle/>
+                    <a:p>
+                      <a:pPr marL="0" marR="0" lvl="0" indent="0" algn="l" defTabSz="914400" rtl="0" eaLnBrk="1" fontAlgn="auto" latinLnBrk="1" hangingPunct="1">
+                        <a:lnSpc>
+                          <a:spcPct val="100000"/>
+                        </a:lnSpc>
+                        <a:spcBef>
+                          <a:spcPts val="0"/>
+                        </a:spcBef>
+                        <a:spcAft>
+                          <a:spcPts val="0"/>
+                        </a:spcAft>
+                        <a:buClrTx/>
+                        <a:buSzTx/>
+                        <a:buFontTx/>
+                        <a:buNone/>
+                        <a:tabLst/>
+                        <a:defRPr/>
+                      </a:pPr>
+                      <a:r>
+                        <a:rPr lang="en-US" altLang="ko-KR" sz="1200" dirty="0"/>
+                        <a:t>Not null</a:t>
+                      </a:r>
+                    </a:p>
+                  </a:txBody>
+                  <a:tcPr/>
+                </a:tc>
+                <a:extLst>
+                  <a:ext uri="{0D108BD9-81ED-4DB2-BD59-A6C34878D82A}">
+                    <a16:rowId xmlns:a16="http://schemas.microsoft.com/office/drawing/2014/main" val="3363086814"/>
                   </a:ext>
                 </a:extLst>
               </a:tr>
@@ -4371,7 +4471,7 @@
                 </a:tc>
                 <a:extLst>
                   <a:ext uri="{0D108BD9-81ED-4DB2-BD59-A6C34878D82A}">
-                    <a16:rowId xmlns:a16="http://schemas.microsoft.com/office/drawing/2014/main" val="3363086814"/>
+                    <a16:rowId xmlns:a16="http://schemas.microsoft.com/office/drawing/2014/main" val="3077736067"/>
                   </a:ext>
                 </a:extLst>
               </a:tr>
